--- a/presentation/presentation_fixed.pptx
+++ b/presentation/presentation_fixed.pptx
@@ -14,13 +14,15 @@
     <p:sldId id="262" r:id="rId8"/>
     <p:sldId id="263" r:id="rId9"/>
     <p:sldId id="270" r:id="rId10"/>
-    <p:sldId id="271" r:id="rId11"/>
-    <p:sldId id="264" r:id="rId12"/>
-    <p:sldId id="265" r:id="rId13"/>
-    <p:sldId id="266" r:id="rId14"/>
-    <p:sldId id="267" r:id="rId15"/>
-    <p:sldId id="268" r:id="rId16"/>
-    <p:sldId id="269" r:id="rId17"/>
+    <p:sldId id="272" r:id="rId11"/>
+    <p:sldId id="273" r:id="rId12"/>
+    <p:sldId id="271" r:id="rId13"/>
+    <p:sldId id="264" r:id="rId14"/>
+    <p:sldId id="265" r:id="rId15"/>
+    <p:sldId id="266" r:id="rId16"/>
+    <p:sldId id="267" r:id="rId17"/>
+    <p:sldId id="268" r:id="rId18"/>
+    <p:sldId id="269" r:id="rId19"/>
   </p:sldIdLst>
   <p:sldSz cx="9144000" cy="6858000" type="screen4x3"/>
   <p:notesSz cx="6858000" cy="9144000"/>
@@ -133,6 +135,8 @@
             <p14:sldId id="262"/>
             <p14:sldId id="263"/>
             <p14:sldId id="270"/>
+            <p14:sldId id="272"/>
+            <p14:sldId id="273"/>
             <p14:sldId id="271"/>
             <p14:sldId id="264"/>
             <p14:sldId id="265"/>
@@ -401,12 +405,12 @@
         <c:gapWidth val="95"/>
         <c:gapDepth val="95"/>
         <c:shape val="box"/>
-        <c:axId val="129789952"/>
-        <c:axId val="129791104"/>
+        <c:axId val="129124992"/>
+        <c:axId val="129683840"/>
         <c:axId val="0"/>
       </c:bar3DChart>
       <c:catAx>
-        <c:axId val="129789952"/>
+        <c:axId val="129124992"/>
         <c:scaling>
           <c:orientation val="minMax"/>
         </c:scaling>
@@ -415,7 +419,7 @@
         <c:majorTickMark val="none"/>
         <c:minorTickMark val="none"/>
         <c:tickLblPos val="nextTo"/>
-        <c:crossAx val="129791104"/>
+        <c:crossAx val="129683840"/>
         <c:crosses val="autoZero"/>
         <c:auto val="1"/>
         <c:lblAlgn val="ctr"/>
@@ -423,7 +427,7 @@
         <c:noMultiLvlLbl val="0"/>
       </c:catAx>
       <c:valAx>
-        <c:axId val="129791104"/>
+        <c:axId val="129683840"/>
         <c:scaling>
           <c:orientation val="minMax"/>
         </c:scaling>
@@ -433,7 +437,7 @@
         <c:majorTickMark val="none"/>
         <c:minorTickMark val="none"/>
         <c:tickLblPos val="nextTo"/>
-        <c:crossAx val="129789952"/>
+        <c:crossAx val="129124992"/>
         <c:crosses val="autoZero"/>
         <c:crossBetween val="between"/>
       </c:valAx>
@@ -4550,8 +4554,8 @@
     <dgm:cxn modelId="{43D08E98-EE3F-45BB-B830-A4E89C56E89C}" type="presOf" srcId="{A1FA5922-4760-4C00-8564-7F7CEE847B09}" destId="{4AACD831-027C-40DA-8470-2D325E39C512}" srcOrd="0" destOrd="0" presId="urn:microsoft.com/office/officeart/2005/8/layout/process5"/>
     <dgm:cxn modelId="{6434638C-0EF3-4130-A352-FBA509690373}" type="presOf" srcId="{950E4386-2837-4AFA-97CF-87ACDD9F94C9}" destId="{E18439A4-D895-458D-832D-A7454E163F0A}" srcOrd="0" destOrd="0" presId="urn:microsoft.com/office/officeart/2005/8/layout/process5"/>
     <dgm:cxn modelId="{ECF10B7F-7EE2-427A-95B6-20E51C8DE5B4}" srcId="{3F57D5FD-A62B-4734-98B9-F2A178BC4474}" destId="{BF3833C5-96B6-474E-BAED-3524E01210B0}" srcOrd="0" destOrd="0" parTransId="{92D23B2C-1E44-45B3-9BAC-81993C024BE4}" sibTransId="{950E4386-2837-4AFA-97CF-87ACDD9F94C9}"/>
+    <dgm:cxn modelId="{E1FA69BF-38D8-41A5-9A94-BF8663D74CF3}" type="presOf" srcId="{BF3833C5-96B6-474E-BAED-3524E01210B0}" destId="{0DE8CD17-9326-47FA-9268-DE73922D406E}" srcOrd="0" destOrd="0" presId="urn:microsoft.com/office/officeart/2005/8/layout/process5"/>
     <dgm:cxn modelId="{B6E37531-08B8-4DEF-A87B-102524FD5BFC}" type="presOf" srcId="{0A983B2F-9CBC-439E-9278-865445CC3E41}" destId="{EABFBD9F-054F-47B6-A482-4E998E234679}" srcOrd="1" destOrd="0" presId="urn:microsoft.com/office/officeart/2005/8/layout/process5"/>
-    <dgm:cxn modelId="{E1FA69BF-38D8-41A5-9A94-BF8663D74CF3}" type="presOf" srcId="{BF3833C5-96B6-474E-BAED-3524E01210B0}" destId="{0DE8CD17-9326-47FA-9268-DE73922D406E}" srcOrd="0" destOrd="0" presId="urn:microsoft.com/office/officeart/2005/8/layout/process5"/>
     <dgm:cxn modelId="{B85B0664-BB5A-44B8-8B4E-D1C776A5926C}" type="presParOf" srcId="{BEA29702-C24F-4E39-9C2E-03D5514F7EB3}" destId="{0DE8CD17-9326-47FA-9268-DE73922D406E}" srcOrd="0" destOrd="0" presId="urn:microsoft.com/office/officeart/2005/8/layout/process5"/>
     <dgm:cxn modelId="{531FECF6-086A-46ED-AECD-0409CD2CD56D}" type="presParOf" srcId="{BEA29702-C24F-4E39-9C2E-03D5514F7EB3}" destId="{E18439A4-D895-458D-832D-A7454E163F0A}" srcOrd="1" destOrd="0" presId="urn:microsoft.com/office/officeart/2005/8/layout/process5"/>
     <dgm:cxn modelId="{B93C98DC-B79E-463A-9A8A-46AA16E80519}" type="presParOf" srcId="{E18439A4-D895-458D-832D-A7454E163F0A}" destId="{FDAFE5AB-4181-4451-A169-334805834916}" srcOrd="0" destOrd="0" presId="urn:microsoft.com/office/officeart/2005/8/layout/process5"/>
@@ -5640,6 +5644,1221 @@
       <dsp:cNvGrpSpPr/>
     </dsp:nvGrpSpPr>
     <dsp:grpSpPr/>
+    <dsp:sp modelId="{0DE8CD17-9326-47FA-9268-DE73922D406E}">
+      <dsp:nvSpPr>
+        <dsp:cNvPr id="0" name=""/>
+        <dsp:cNvSpPr/>
+      </dsp:nvSpPr>
+      <dsp:spPr>
+        <a:xfrm>
+          <a:off x="0" y="274719"/>
+          <a:ext cx="1255843" cy="888694"/>
+        </a:xfrm>
+        <a:prstGeom prst="roundRect">
+          <a:avLst>
+            <a:gd name="adj" fmla="val 10000"/>
+          </a:avLst>
+        </a:prstGeom>
+        <a:gradFill rotWithShape="0">
+          <a:gsLst>
+            <a:gs pos="0">
+              <a:schemeClr val="accent1">
+                <a:alpha val="90000"/>
+                <a:hueOff val="0"/>
+                <a:satOff val="0"/>
+                <a:lumOff val="0"/>
+                <a:alphaOff val="0"/>
+                <a:shade val="60000"/>
+              </a:schemeClr>
+            </a:gs>
+            <a:gs pos="33000">
+              <a:schemeClr val="accent1">
+                <a:alpha val="90000"/>
+                <a:hueOff val="0"/>
+                <a:satOff val="0"/>
+                <a:lumOff val="0"/>
+                <a:alphaOff val="0"/>
+                <a:tint val="86500"/>
+              </a:schemeClr>
+            </a:gs>
+            <a:gs pos="46750">
+              <a:schemeClr val="accent1">
+                <a:alpha val="90000"/>
+                <a:hueOff val="0"/>
+                <a:satOff val="0"/>
+                <a:lumOff val="0"/>
+                <a:alphaOff val="0"/>
+                <a:tint val="71000"/>
+                <a:satMod val="112000"/>
+              </a:schemeClr>
+            </a:gs>
+            <a:gs pos="53000">
+              <a:schemeClr val="accent1">
+                <a:alpha val="90000"/>
+                <a:hueOff val="0"/>
+                <a:satOff val="0"/>
+                <a:lumOff val="0"/>
+                <a:alphaOff val="0"/>
+                <a:tint val="71000"/>
+                <a:satMod val="112000"/>
+              </a:schemeClr>
+            </a:gs>
+            <a:gs pos="68000">
+              <a:schemeClr val="accent1">
+                <a:alpha val="90000"/>
+                <a:hueOff val="0"/>
+                <a:satOff val="0"/>
+                <a:lumOff val="0"/>
+                <a:alphaOff val="0"/>
+                <a:tint val="86000"/>
+              </a:schemeClr>
+            </a:gs>
+            <a:gs pos="100000">
+              <a:schemeClr val="accent1">
+                <a:alpha val="90000"/>
+                <a:hueOff val="0"/>
+                <a:satOff val="0"/>
+                <a:lumOff val="0"/>
+                <a:alphaOff val="0"/>
+                <a:shade val="60000"/>
+              </a:schemeClr>
+            </a:gs>
+          </a:gsLst>
+          <a:lin ang="8350000" scaled="1"/>
+        </a:gradFill>
+        <a:ln>
+          <a:noFill/>
+        </a:ln>
+        <a:effectLst>
+          <a:outerShdw blurRad="190500" dist="228600" dir="2700000" sy="90000" rotWithShape="0">
+            <a:srgbClr val="000000">
+              <a:alpha val="25500"/>
+            </a:srgbClr>
+          </a:outerShdw>
+        </a:effectLst>
+      </dsp:spPr>
+      <dsp:style>
+        <a:lnRef idx="0">
+          <a:scrgbClr r="0" g="0" b="0"/>
+        </a:lnRef>
+        <a:fillRef idx="3">
+          <a:scrgbClr r="0" g="0" b="0"/>
+        </a:fillRef>
+        <a:effectRef idx="2">
+          <a:scrgbClr r="0" g="0" b="0"/>
+        </a:effectRef>
+        <a:fontRef idx="minor">
+          <a:schemeClr val="lt1"/>
+        </a:fontRef>
+      </dsp:style>
+      <dsp:txBody>
+        <a:bodyPr spcFirstLastPara="0" vert="horz" wrap="square" lIns="45720" tIns="45720" rIns="45720" bIns="45720" numCol="1" spcCol="1270" anchor="ctr" anchorCtr="0">
+          <a:noAutofit/>
+        </a:bodyPr>
+        <a:lstStyle/>
+        <a:p>
+          <a:pPr lvl="0" algn="ctr" defTabSz="533400">
+            <a:lnSpc>
+              <a:spcPct val="90000"/>
+            </a:lnSpc>
+            <a:spcBef>
+              <a:spcPct val="0"/>
+            </a:spcBef>
+            <a:spcAft>
+              <a:spcPct val="35000"/>
+            </a:spcAft>
+          </a:pPr>
+          <a:r>
+            <a:rPr lang="ru-RU" sz="1200" b="1" kern="1200" dirty="0" smtClean="0"/>
+            <a:t>Ввод данных</a:t>
+          </a:r>
+          <a:endParaRPr lang="ru-RU" sz="1200" b="1" kern="1200" dirty="0"/>
+        </a:p>
+      </dsp:txBody>
+      <dsp:txXfrm>
+        <a:off x="26029" y="300748"/>
+        <a:ext cx="1203785" cy="836636"/>
+      </dsp:txXfrm>
+    </dsp:sp>
+    <dsp:sp modelId="{E18439A4-D895-458D-832D-A7454E163F0A}">
+      <dsp:nvSpPr>
+        <dsp:cNvPr id="0" name=""/>
+        <dsp:cNvSpPr/>
+      </dsp:nvSpPr>
+      <dsp:spPr>
+        <a:xfrm rot="49844">
+          <a:off x="1379580" y="548463"/>
+          <a:ext cx="298163" cy="367326"/>
+        </a:xfrm>
+        <a:prstGeom prst="rightArrow">
+          <a:avLst>
+            <a:gd name="adj1" fmla="val 60000"/>
+            <a:gd name="adj2" fmla="val 50000"/>
+          </a:avLst>
+        </a:prstGeom>
+        <a:gradFill rotWithShape="0">
+          <a:gsLst>
+            <a:gs pos="0">
+              <a:schemeClr val="accent1">
+                <a:shade val="90000"/>
+                <a:hueOff val="0"/>
+                <a:satOff val="0"/>
+                <a:lumOff val="0"/>
+                <a:alphaOff val="0"/>
+                <a:shade val="60000"/>
+              </a:schemeClr>
+            </a:gs>
+            <a:gs pos="33000">
+              <a:schemeClr val="accent1">
+                <a:shade val="90000"/>
+                <a:hueOff val="0"/>
+                <a:satOff val="0"/>
+                <a:lumOff val="0"/>
+                <a:alphaOff val="0"/>
+                <a:tint val="86500"/>
+              </a:schemeClr>
+            </a:gs>
+            <a:gs pos="46750">
+              <a:schemeClr val="accent1">
+                <a:shade val="90000"/>
+                <a:hueOff val="0"/>
+                <a:satOff val="0"/>
+                <a:lumOff val="0"/>
+                <a:alphaOff val="0"/>
+                <a:tint val="71000"/>
+                <a:satMod val="112000"/>
+              </a:schemeClr>
+            </a:gs>
+            <a:gs pos="53000">
+              <a:schemeClr val="accent1">
+                <a:shade val="90000"/>
+                <a:hueOff val="0"/>
+                <a:satOff val="0"/>
+                <a:lumOff val="0"/>
+                <a:alphaOff val="0"/>
+                <a:tint val="71000"/>
+                <a:satMod val="112000"/>
+              </a:schemeClr>
+            </a:gs>
+            <a:gs pos="68000">
+              <a:schemeClr val="accent1">
+                <a:shade val="90000"/>
+                <a:hueOff val="0"/>
+                <a:satOff val="0"/>
+                <a:lumOff val="0"/>
+                <a:alphaOff val="0"/>
+                <a:tint val="86000"/>
+              </a:schemeClr>
+            </a:gs>
+            <a:gs pos="100000">
+              <a:schemeClr val="accent1">
+                <a:shade val="90000"/>
+                <a:hueOff val="0"/>
+                <a:satOff val="0"/>
+                <a:lumOff val="0"/>
+                <a:alphaOff val="0"/>
+                <a:shade val="60000"/>
+              </a:schemeClr>
+            </a:gs>
+          </a:gsLst>
+          <a:lin ang="8350000" scaled="1"/>
+        </a:gradFill>
+        <a:ln>
+          <a:noFill/>
+        </a:ln>
+        <a:effectLst>
+          <a:outerShdw blurRad="190500" dist="228600" dir="2700000" sy="90000" rotWithShape="0">
+            <a:srgbClr val="000000">
+              <a:alpha val="25500"/>
+            </a:srgbClr>
+          </a:outerShdw>
+        </a:effectLst>
+      </dsp:spPr>
+      <dsp:style>
+        <a:lnRef idx="0">
+          <a:scrgbClr r="0" g="0" b="0"/>
+        </a:lnRef>
+        <a:fillRef idx="3">
+          <a:scrgbClr r="0" g="0" b="0"/>
+        </a:fillRef>
+        <a:effectRef idx="2">
+          <a:scrgbClr r="0" g="0" b="0"/>
+        </a:effectRef>
+        <a:fontRef idx="minor">
+          <a:schemeClr val="lt1"/>
+        </a:fontRef>
+      </dsp:style>
+      <dsp:txBody>
+        <a:bodyPr spcFirstLastPara="0" vert="horz" wrap="square" lIns="0" tIns="0" rIns="0" bIns="0" numCol="1" spcCol="1270" anchor="ctr" anchorCtr="0">
+          <a:noAutofit/>
+        </a:bodyPr>
+        <a:lstStyle/>
+        <a:p>
+          <a:pPr lvl="0" algn="ctr" defTabSz="711200">
+            <a:lnSpc>
+              <a:spcPct val="90000"/>
+            </a:lnSpc>
+            <a:spcBef>
+              <a:spcPct val="0"/>
+            </a:spcBef>
+            <a:spcAft>
+              <a:spcPct val="35000"/>
+            </a:spcAft>
+          </a:pPr>
+          <a:endParaRPr lang="ru-RU" sz="1600" kern="1200"/>
+        </a:p>
+      </dsp:txBody>
+      <dsp:txXfrm>
+        <a:off x="1379585" y="621280"/>
+        <a:ext cx="208714" cy="220396"/>
+      </dsp:txXfrm>
+    </dsp:sp>
+    <dsp:sp modelId="{D1B281A0-515A-4812-8BEE-C5BC882CF29A}">
+      <dsp:nvSpPr>
+        <dsp:cNvPr id="0" name=""/>
+        <dsp:cNvSpPr/>
+      </dsp:nvSpPr>
+      <dsp:spPr>
+        <a:xfrm>
+          <a:off x="1818357" y="301051"/>
+          <a:ext cx="1251147" cy="888694"/>
+        </a:xfrm>
+        <a:prstGeom prst="roundRect">
+          <a:avLst>
+            <a:gd name="adj" fmla="val 10000"/>
+          </a:avLst>
+        </a:prstGeom>
+        <a:gradFill rotWithShape="0">
+          <a:gsLst>
+            <a:gs pos="0">
+              <a:schemeClr val="accent1">
+                <a:alpha val="90000"/>
+                <a:hueOff val="0"/>
+                <a:satOff val="0"/>
+                <a:lumOff val="0"/>
+                <a:alphaOff val="-10000"/>
+                <a:shade val="60000"/>
+              </a:schemeClr>
+            </a:gs>
+            <a:gs pos="33000">
+              <a:schemeClr val="accent1">
+                <a:alpha val="90000"/>
+                <a:hueOff val="0"/>
+                <a:satOff val="0"/>
+                <a:lumOff val="0"/>
+                <a:alphaOff val="-10000"/>
+                <a:tint val="86500"/>
+              </a:schemeClr>
+            </a:gs>
+            <a:gs pos="46750">
+              <a:schemeClr val="accent1">
+                <a:alpha val="90000"/>
+                <a:hueOff val="0"/>
+                <a:satOff val="0"/>
+                <a:lumOff val="0"/>
+                <a:alphaOff val="-10000"/>
+                <a:tint val="71000"/>
+                <a:satMod val="112000"/>
+              </a:schemeClr>
+            </a:gs>
+            <a:gs pos="53000">
+              <a:schemeClr val="accent1">
+                <a:alpha val="90000"/>
+                <a:hueOff val="0"/>
+                <a:satOff val="0"/>
+                <a:lumOff val="0"/>
+                <a:alphaOff val="-10000"/>
+                <a:tint val="71000"/>
+                <a:satMod val="112000"/>
+              </a:schemeClr>
+            </a:gs>
+            <a:gs pos="68000">
+              <a:schemeClr val="accent1">
+                <a:alpha val="90000"/>
+                <a:hueOff val="0"/>
+                <a:satOff val="0"/>
+                <a:lumOff val="0"/>
+                <a:alphaOff val="-10000"/>
+                <a:tint val="86000"/>
+              </a:schemeClr>
+            </a:gs>
+            <a:gs pos="100000">
+              <a:schemeClr val="accent1">
+                <a:alpha val="90000"/>
+                <a:hueOff val="0"/>
+                <a:satOff val="0"/>
+                <a:lumOff val="0"/>
+                <a:alphaOff val="-10000"/>
+                <a:shade val="60000"/>
+              </a:schemeClr>
+            </a:gs>
+          </a:gsLst>
+          <a:lin ang="8350000" scaled="1"/>
+        </a:gradFill>
+        <a:ln>
+          <a:noFill/>
+        </a:ln>
+        <a:effectLst>
+          <a:outerShdw blurRad="190500" dist="228600" dir="2700000" sy="90000" rotWithShape="0">
+            <a:srgbClr val="000000">
+              <a:alpha val="25500"/>
+            </a:srgbClr>
+          </a:outerShdw>
+        </a:effectLst>
+      </dsp:spPr>
+      <dsp:style>
+        <a:lnRef idx="0">
+          <a:scrgbClr r="0" g="0" b="0"/>
+        </a:lnRef>
+        <a:fillRef idx="3">
+          <a:scrgbClr r="0" g="0" b="0"/>
+        </a:fillRef>
+        <a:effectRef idx="2">
+          <a:scrgbClr r="0" g="0" b="0"/>
+        </a:effectRef>
+        <a:fontRef idx="minor">
+          <a:schemeClr val="lt1"/>
+        </a:fontRef>
+      </dsp:style>
+      <dsp:txBody>
+        <a:bodyPr spcFirstLastPara="0" vert="horz" wrap="square" lIns="45720" tIns="45720" rIns="45720" bIns="45720" numCol="1" spcCol="1270" anchor="ctr" anchorCtr="0">
+          <a:noAutofit/>
+        </a:bodyPr>
+        <a:lstStyle/>
+        <a:p>
+          <a:pPr lvl="0" algn="ctr" defTabSz="533400">
+            <a:lnSpc>
+              <a:spcPct val="90000"/>
+            </a:lnSpc>
+            <a:spcBef>
+              <a:spcPct val="0"/>
+            </a:spcBef>
+            <a:spcAft>
+              <a:spcPct val="35000"/>
+            </a:spcAft>
+          </a:pPr>
+          <a:r>
+            <a:rPr lang="ru-RU" sz="1200" b="1" kern="1200" dirty="0" smtClean="0"/>
+            <a:t>Проверка генерации договоров</a:t>
+          </a:r>
+          <a:endParaRPr lang="ru-RU" sz="1200" b="1" kern="1200" dirty="0"/>
+        </a:p>
+      </dsp:txBody>
+      <dsp:txXfrm>
+        <a:off x="1844386" y="327080"/>
+        <a:ext cx="1199089" cy="836636"/>
+      </dsp:txXfrm>
+    </dsp:sp>
+    <dsp:sp modelId="{7D64F9D0-F65B-4C82-BFDD-B2D7B74C584B}">
+      <dsp:nvSpPr>
+        <dsp:cNvPr id="0" name=""/>
+        <dsp:cNvSpPr/>
+      </dsp:nvSpPr>
+      <dsp:spPr>
+        <a:xfrm>
+          <a:off x="3178363" y="561734"/>
+          <a:ext cx="262249" cy="367326"/>
+        </a:xfrm>
+        <a:prstGeom prst="rightArrow">
+          <a:avLst>
+            <a:gd name="adj1" fmla="val 60000"/>
+            <a:gd name="adj2" fmla="val 50000"/>
+          </a:avLst>
+        </a:prstGeom>
+        <a:gradFill rotWithShape="0">
+          <a:gsLst>
+            <a:gs pos="0">
+              <a:schemeClr val="accent1">
+                <a:shade val="90000"/>
+                <a:hueOff val="-61267"/>
+                <a:satOff val="-1102"/>
+                <a:lumOff val="8948"/>
+                <a:alphaOff val="0"/>
+                <a:shade val="60000"/>
+              </a:schemeClr>
+            </a:gs>
+            <a:gs pos="33000">
+              <a:schemeClr val="accent1">
+                <a:shade val="90000"/>
+                <a:hueOff val="-61267"/>
+                <a:satOff val="-1102"/>
+                <a:lumOff val="8948"/>
+                <a:alphaOff val="0"/>
+                <a:tint val="86500"/>
+              </a:schemeClr>
+            </a:gs>
+            <a:gs pos="46750">
+              <a:schemeClr val="accent1">
+                <a:shade val="90000"/>
+                <a:hueOff val="-61267"/>
+                <a:satOff val="-1102"/>
+                <a:lumOff val="8948"/>
+                <a:alphaOff val="0"/>
+                <a:tint val="71000"/>
+                <a:satMod val="112000"/>
+              </a:schemeClr>
+            </a:gs>
+            <a:gs pos="53000">
+              <a:schemeClr val="accent1">
+                <a:shade val="90000"/>
+                <a:hueOff val="-61267"/>
+                <a:satOff val="-1102"/>
+                <a:lumOff val="8948"/>
+                <a:alphaOff val="0"/>
+                <a:tint val="71000"/>
+                <a:satMod val="112000"/>
+              </a:schemeClr>
+            </a:gs>
+            <a:gs pos="68000">
+              <a:schemeClr val="accent1">
+                <a:shade val="90000"/>
+                <a:hueOff val="-61267"/>
+                <a:satOff val="-1102"/>
+                <a:lumOff val="8948"/>
+                <a:alphaOff val="0"/>
+                <a:tint val="86000"/>
+              </a:schemeClr>
+            </a:gs>
+            <a:gs pos="100000">
+              <a:schemeClr val="accent1">
+                <a:shade val="90000"/>
+                <a:hueOff val="-61267"/>
+                <a:satOff val="-1102"/>
+                <a:lumOff val="8948"/>
+                <a:alphaOff val="0"/>
+                <a:shade val="60000"/>
+              </a:schemeClr>
+            </a:gs>
+          </a:gsLst>
+          <a:lin ang="8350000" scaled="1"/>
+        </a:gradFill>
+        <a:ln>
+          <a:noFill/>
+        </a:ln>
+        <a:effectLst>
+          <a:outerShdw blurRad="190500" dist="228600" dir="2700000" sy="90000" rotWithShape="0">
+            <a:srgbClr val="000000">
+              <a:alpha val="25500"/>
+            </a:srgbClr>
+          </a:outerShdw>
+        </a:effectLst>
+      </dsp:spPr>
+      <dsp:style>
+        <a:lnRef idx="0">
+          <a:scrgbClr r="0" g="0" b="0"/>
+        </a:lnRef>
+        <a:fillRef idx="3">
+          <a:scrgbClr r="0" g="0" b="0"/>
+        </a:fillRef>
+        <a:effectRef idx="2">
+          <a:scrgbClr r="0" g="0" b="0"/>
+        </a:effectRef>
+        <a:fontRef idx="minor">
+          <a:schemeClr val="lt1"/>
+        </a:fontRef>
+      </dsp:style>
+      <dsp:txBody>
+        <a:bodyPr spcFirstLastPara="0" vert="horz" wrap="square" lIns="0" tIns="0" rIns="0" bIns="0" numCol="1" spcCol="1270" anchor="ctr" anchorCtr="0">
+          <a:noAutofit/>
+        </a:bodyPr>
+        <a:lstStyle/>
+        <a:p>
+          <a:pPr lvl="0" algn="ctr" defTabSz="711200">
+            <a:lnSpc>
+              <a:spcPct val="90000"/>
+            </a:lnSpc>
+            <a:spcBef>
+              <a:spcPct val="0"/>
+            </a:spcBef>
+            <a:spcAft>
+              <a:spcPct val="35000"/>
+            </a:spcAft>
+          </a:pPr>
+          <a:endParaRPr lang="ru-RU" sz="1600" kern="1200"/>
+        </a:p>
+      </dsp:txBody>
+      <dsp:txXfrm>
+        <a:off x="3178363" y="635199"/>
+        <a:ext cx="183574" cy="220396"/>
+      </dsp:txXfrm>
+    </dsp:sp>
+    <dsp:sp modelId="{59FE72C3-E144-4123-981C-B121EB3ED0C8}">
+      <dsp:nvSpPr>
+        <dsp:cNvPr id="0" name=""/>
+        <dsp:cNvSpPr/>
+      </dsp:nvSpPr>
+      <dsp:spPr>
+        <a:xfrm>
+          <a:off x="3564315" y="301051"/>
+          <a:ext cx="1162811" cy="888694"/>
+        </a:xfrm>
+        <a:prstGeom prst="roundRect">
+          <a:avLst>
+            <a:gd name="adj" fmla="val 10000"/>
+          </a:avLst>
+        </a:prstGeom>
+        <a:gradFill rotWithShape="0">
+          <a:gsLst>
+            <a:gs pos="0">
+              <a:schemeClr val="accent1">
+                <a:alpha val="90000"/>
+                <a:hueOff val="0"/>
+                <a:satOff val="0"/>
+                <a:lumOff val="0"/>
+                <a:alphaOff val="-20000"/>
+                <a:shade val="60000"/>
+              </a:schemeClr>
+            </a:gs>
+            <a:gs pos="33000">
+              <a:schemeClr val="accent1">
+                <a:alpha val="90000"/>
+                <a:hueOff val="0"/>
+                <a:satOff val="0"/>
+                <a:lumOff val="0"/>
+                <a:alphaOff val="-20000"/>
+                <a:tint val="86500"/>
+              </a:schemeClr>
+            </a:gs>
+            <a:gs pos="46750">
+              <a:schemeClr val="accent1">
+                <a:alpha val="90000"/>
+                <a:hueOff val="0"/>
+                <a:satOff val="0"/>
+                <a:lumOff val="0"/>
+                <a:alphaOff val="-20000"/>
+                <a:tint val="71000"/>
+                <a:satMod val="112000"/>
+              </a:schemeClr>
+            </a:gs>
+            <a:gs pos="53000">
+              <a:schemeClr val="accent1">
+                <a:alpha val="90000"/>
+                <a:hueOff val="0"/>
+                <a:satOff val="0"/>
+                <a:lumOff val="0"/>
+                <a:alphaOff val="-20000"/>
+                <a:tint val="71000"/>
+                <a:satMod val="112000"/>
+              </a:schemeClr>
+            </a:gs>
+            <a:gs pos="68000">
+              <a:schemeClr val="accent1">
+                <a:alpha val="90000"/>
+                <a:hueOff val="0"/>
+                <a:satOff val="0"/>
+                <a:lumOff val="0"/>
+                <a:alphaOff val="-20000"/>
+                <a:tint val="86000"/>
+              </a:schemeClr>
+            </a:gs>
+            <a:gs pos="100000">
+              <a:schemeClr val="accent1">
+                <a:alpha val="90000"/>
+                <a:hueOff val="0"/>
+                <a:satOff val="0"/>
+                <a:lumOff val="0"/>
+                <a:alphaOff val="-20000"/>
+                <a:shade val="60000"/>
+              </a:schemeClr>
+            </a:gs>
+          </a:gsLst>
+          <a:lin ang="8350000" scaled="1"/>
+        </a:gradFill>
+        <a:ln>
+          <a:noFill/>
+        </a:ln>
+        <a:effectLst>
+          <a:outerShdw blurRad="190500" dist="228600" dir="2700000" sy="90000" rotWithShape="0">
+            <a:srgbClr val="000000">
+              <a:alpha val="25500"/>
+            </a:srgbClr>
+          </a:outerShdw>
+        </a:effectLst>
+      </dsp:spPr>
+      <dsp:style>
+        <a:lnRef idx="0">
+          <a:scrgbClr r="0" g="0" b="0"/>
+        </a:lnRef>
+        <a:fillRef idx="3">
+          <a:scrgbClr r="0" g="0" b="0"/>
+        </a:fillRef>
+        <a:effectRef idx="2">
+          <a:scrgbClr r="0" g="0" b="0"/>
+        </a:effectRef>
+        <a:fontRef idx="minor">
+          <a:schemeClr val="lt1"/>
+        </a:fontRef>
+      </dsp:style>
+      <dsp:txBody>
+        <a:bodyPr spcFirstLastPara="0" vert="horz" wrap="square" lIns="45720" tIns="45720" rIns="45720" bIns="45720" numCol="1" spcCol="1270" anchor="ctr" anchorCtr="0">
+          <a:noAutofit/>
+        </a:bodyPr>
+        <a:lstStyle/>
+        <a:p>
+          <a:pPr lvl="0" algn="ctr" defTabSz="533400">
+            <a:lnSpc>
+              <a:spcPct val="90000"/>
+            </a:lnSpc>
+            <a:spcBef>
+              <a:spcPct val="0"/>
+            </a:spcBef>
+            <a:spcAft>
+              <a:spcPct val="35000"/>
+            </a:spcAft>
+          </a:pPr>
+          <a:r>
+            <a:rPr lang="ru-RU" sz="1200" b="1" kern="1200" dirty="0" smtClean="0"/>
+            <a:t>Сохранения в </a:t>
+          </a:r>
+          <a:r>
+            <a:rPr lang="en-US" sz="1200" b="1" kern="1200" dirty="0" err="1" smtClean="0"/>
+            <a:t>PostgreSQL</a:t>
+          </a:r>
+          <a:endParaRPr lang="ru-RU" sz="1200" b="1" kern="1200" dirty="0"/>
+        </a:p>
+      </dsp:txBody>
+      <dsp:txXfrm>
+        <a:off x="3590344" y="327080"/>
+        <a:ext cx="1110753" cy="836636"/>
+      </dsp:txXfrm>
+    </dsp:sp>
+    <dsp:sp modelId="{4AACD831-027C-40DA-8470-2D325E39C512}">
+      <dsp:nvSpPr>
+        <dsp:cNvPr id="0" name=""/>
+        <dsp:cNvSpPr/>
+      </dsp:nvSpPr>
+      <dsp:spPr>
+        <a:xfrm rot="21574575">
+          <a:off x="4843603" y="555535"/>
+          <a:ext cx="280618" cy="367326"/>
+        </a:xfrm>
+        <a:prstGeom prst="rightArrow">
+          <a:avLst>
+            <a:gd name="adj1" fmla="val 60000"/>
+            <a:gd name="adj2" fmla="val 50000"/>
+          </a:avLst>
+        </a:prstGeom>
+        <a:gradFill rotWithShape="0">
+          <a:gsLst>
+            <a:gs pos="0">
+              <a:schemeClr val="accent1">
+                <a:shade val="90000"/>
+                <a:hueOff val="-122535"/>
+                <a:satOff val="-2205"/>
+                <a:lumOff val="17897"/>
+                <a:alphaOff val="0"/>
+                <a:shade val="60000"/>
+              </a:schemeClr>
+            </a:gs>
+            <a:gs pos="33000">
+              <a:schemeClr val="accent1">
+                <a:shade val="90000"/>
+                <a:hueOff val="-122535"/>
+                <a:satOff val="-2205"/>
+                <a:lumOff val="17897"/>
+                <a:alphaOff val="0"/>
+                <a:tint val="86500"/>
+              </a:schemeClr>
+            </a:gs>
+            <a:gs pos="46750">
+              <a:schemeClr val="accent1">
+                <a:shade val="90000"/>
+                <a:hueOff val="-122535"/>
+                <a:satOff val="-2205"/>
+                <a:lumOff val="17897"/>
+                <a:alphaOff val="0"/>
+                <a:tint val="71000"/>
+                <a:satMod val="112000"/>
+              </a:schemeClr>
+            </a:gs>
+            <a:gs pos="53000">
+              <a:schemeClr val="accent1">
+                <a:shade val="90000"/>
+                <a:hueOff val="-122535"/>
+                <a:satOff val="-2205"/>
+                <a:lumOff val="17897"/>
+                <a:alphaOff val="0"/>
+                <a:tint val="71000"/>
+                <a:satMod val="112000"/>
+              </a:schemeClr>
+            </a:gs>
+            <a:gs pos="68000">
+              <a:schemeClr val="accent1">
+                <a:shade val="90000"/>
+                <a:hueOff val="-122535"/>
+                <a:satOff val="-2205"/>
+                <a:lumOff val="17897"/>
+                <a:alphaOff val="0"/>
+                <a:tint val="86000"/>
+              </a:schemeClr>
+            </a:gs>
+            <a:gs pos="100000">
+              <a:schemeClr val="accent1">
+                <a:shade val="90000"/>
+                <a:hueOff val="-122535"/>
+                <a:satOff val="-2205"/>
+                <a:lumOff val="17897"/>
+                <a:alphaOff val="0"/>
+                <a:shade val="60000"/>
+              </a:schemeClr>
+            </a:gs>
+          </a:gsLst>
+          <a:lin ang="8350000" scaled="1"/>
+        </a:gradFill>
+        <a:ln>
+          <a:noFill/>
+        </a:ln>
+        <a:effectLst>
+          <a:outerShdw blurRad="190500" dist="228600" dir="2700000" sy="90000" rotWithShape="0">
+            <a:srgbClr val="000000">
+              <a:alpha val="25500"/>
+            </a:srgbClr>
+          </a:outerShdw>
+        </a:effectLst>
+      </dsp:spPr>
+      <dsp:style>
+        <a:lnRef idx="0">
+          <a:scrgbClr r="0" g="0" b="0"/>
+        </a:lnRef>
+        <a:fillRef idx="3">
+          <a:scrgbClr r="0" g="0" b="0"/>
+        </a:fillRef>
+        <a:effectRef idx="2">
+          <a:scrgbClr r="0" g="0" b="0"/>
+        </a:effectRef>
+        <a:fontRef idx="minor">
+          <a:schemeClr val="lt1"/>
+        </a:fontRef>
+      </dsp:style>
+      <dsp:txBody>
+        <a:bodyPr spcFirstLastPara="0" vert="horz" wrap="square" lIns="0" tIns="0" rIns="0" bIns="0" numCol="1" spcCol="1270" anchor="ctr" anchorCtr="0">
+          <a:noAutofit/>
+        </a:bodyPr>
+        <a:lstStyle/>
+        <a:p>
+          <a:pPr lvl="0" algn="ctr" defTabSz="711200">
+            <a:lnSpc>
+              <a:spcPct val="90000"/>
+            </a:lnSpc>
+            <a:spcBef>
+              <a:spcPct val="0"/>
+            </a:spcBef>
+            <a:spcAft>
+              <a:spcPct val="35000"/>
+            </a:spcAft>
+          </a:pPr>
+          <a:endParaRPr lang="ru-RU" sz="1600" kern="1200"/>
+        </a:p>
+      </dsp:txBody>
+      <dsp:txXfrm>
+        <a:off x="4843604" y="629311"/>
+        <a:ext cx="196433" cy="220396"/>
+      </dsp:txXfrm>
+    </dsp:sp>
+    <dsp:sp modelId="{1DE16948-26ED-4AF1-99C6-2DF09E4B1ADF}">
+      <dsp:nvSpPr>
+        <dsp:cNvPr id="0" name=""/>
+        <dsp:cNvSpPr/>
+      </dsp:nvSpPr>
+      <dsp:spPr>
+        <a:xfrm>
+          <a:off x="5256581" y="288032"/>
+          <a:ext cx="1298915" cy="888694"/>
+        </a:xfrm>
+        <a:prstGeom prst="roundRect">
+          <a:avLst>
+            <a:gd name="adj" fmla="val 10000"/>
+          </a:avLst>
+        </a:prstGeom>
+        <a:gradFill rotWithShape="0">
+          <a:gsLst>
+            <a:gs pos="0">
+              <a:schemeClr val="accent1">
+                <a:alpha val="90000"/>
+                <a:hueOff val="0"/>
+                <a:satOff val="0"/>
+                <a:lumOff val="0"/>
+                <a:alphaOff val="-30000"/>
+                <a:shade val="60000"/>
+              </a:schemeClr>
+            </a:gs>
+            <a:gs pos="33000">
+              <a:schemeClr val="accent1">
+                <a:alpha val="90000"/>
+                <a:hueOff val="0"/>
+                <a:satOff val="0"/>
+                <a:lumOff val="0"/>
+                <a:alphaOff val="-30000"/>
+                <a:tint val="86500"/>
+              </a:schemeClr>
+            </a:gs>
+            <a:gs pos="46750">
+              <a:schemeClr val="accent1">
+                <a:alpha val="90000"/>
+                <a:hueOff val="0"/>
+                <a:satOff val="0"/>
+                <a:lumOff val="0"/>
+                <a:alphaOff val="-30000"/>
+                <a:tint val="71000"/>
+                <a:satMod val="112000"/>
+              </a:schemeClr>
+            </a:gs>
+            <a:gs pos="53000">
+              <a:schemeClr val="accent1">
+                <a:alpha val="90000"/>
+                <a:hueOff val="0"/>
+                <a:satOff val="0"/>
+                <a:lumOff val="0"/>
+                <a:alphaOff val="-30000"/>
+                <a:tint val="71000"/>
+                <a:satMod val="112000"/>
+              </a:schemeClr>
+            </a:gs>
+            <a:gs pos="68000">
+              <a:schemeClr val="accent1">
+                <a:alpha val="90000"/>
+                <a:hueOff val="0"/>
+                <a:satOff val="0"/>
+                <a:lumOff val="0"/>
+                <a:alphaOff val="-30000"/>
+                <a:tint val="86000"/>
+              </a:schemeClr>
+            </a:gs>
+            <a:gs pos="100000">
+              <a:schemeClr val="accent1">
+                <a:alpha val="90000"/>
+                <a:hueOff val="0"/>
+                <a:satOff val="0"/>
+                <a:lumOff val="0"/>
+                <a:alphaOff val="-30000"/>
+                <a:shade val="60000"/>
+              </a:schemeClr>
+            </a:gs>
+          </a:gsLst>
+          <a:lin ang="8350000" scaled="1"/>
+        </a:gradFill>
+        <a:ln>
+          <a:noFill/>
+        </a:ln>
+        <a:effectLst>
+          <a:outerShdw blurRad="190500" dist="228600" dir="2700000" sy="90000" rotWithShape="0">
+            <a:srgbClr val="000000">
+              <a:alpha val="25500"/>
+            </a:srgbClr>
+          </a:outerShdw>
+        </a:effectLst>
+      </dsp:spPr>
+      <dsp:style>
+        <a:lnRef idx="0">
+          <a:scrgbClr r="0" g="0" b="0"/>
+        </a:lnRef>
+        <a:fillRef idx="3">
+          <a:scrgbClr r="0" g="0" b="0"/>
+        </a:fillRef>
+        <a:effectRef idx="2">
+          <a:scrgbClr r="0" g="0" b="0"/>
+        </a:effectRef>
+        <a:fontRef idx="minor">
+          <a:schemeClr val="lt1"/>
+        </a:fontRef>
+      </dsp:style>
+      <dsp:txBody>
+        <a:bodyPr spcFirstLastPara="0" vert="horz" wrap="square" lIns="45720" tIns="45720" rIns="45720" bIns="45720" numCol="1" spcCol="1270" anchor="ctr" anchorCtr="0">
+          <a:noAutofit/>
+        </a:bodyPr>
+        <a:lstStyle/>
+        <a:p>
+          <a:pPr lvl="0" algn="ctr" defTabSz="533400">
+            <a:lnSpc>
+              <a:spcPct val="90000"/>
+            </a:lnSpc>
+            <a:spcBef>
+              <a:spcPct val="0"/>
+            </a:spcBef>
+            <a:spcAft>
+              <a:spcPct val="35000"/>
+            </a:spcAft>
+          </a:pPr>
+          <a:r>
+            <a:rPr lang="ru-RU" sz="1200" b="1" kern="1200" dirty="0" smtClean="0"/>
+            <a:t>Проверка команд бота</a:t>
+          </a:r>
+          <a:endParaRPr lang="ru-RU" sz="1200" b="1" kern="1200" dirty="0"/>
+        </a:p>
+      </dsp:txBody>
+      <dsp:txXfrm>
+        <a:off x="5282610" y="314061"/>
+        <a:ext cx="1246857" cy="836636"/>
+      </dsp:txXfrm>
+    </dsp:sp>
+    <dsp:sp modelId="{1BD61378-8977-41E5-90CD-2BEF633C8F59}">
+      <dsp:nvSpPr>
+        <dsp:cNvPr id="0" name=""/>
+        <dsp:cNvSpPr/>
+      </dsp:nvSpPr>
+      <dsp:spPr>
+        <a:xfrm>
+          <a:off x="6681621" y="548715"/>
+          <a:ext cx="303847" cy="367326"/>
+        </a:xfrm>
+        <a:prstGeom prst="rightArrow">
+          <a:avLst>
+            <a:gd name="adj1" fmla="val 60000"/>
+            <a:gd name="adj2" fmla="val 50000"/>
+          </a:avLst>
+        </a:prstGeom>
+        <a:gradFill rotWithShape="0">
+          <a:gsLst>
+            <a:gs pos="0">
+              <a:schemeClr val="accent1">
+                <a:shade val="90000"/>
+                <a:hueOff val="-183802"/>
+                <a:satOff val="-3307"/>
+                <a:lumOff val="26845"/>
+                <a:alphaOff val="0"/>
+                <a:shade val="60000"/>
+              </a:schemeClr>
+            </a:gs>
+            <a:gs pos="33000">
+              <a:schemeClr val="accent1">
+                <a:shade val="90000"/>
+                <a:hueOff val="-183802"/>
+                <a:satOff val="-3307"/>
+                <a:lumOff val="26845"/>
+                <a:alphaOff val="0"/>
+                <a:tint val="86500"/>
+              </a:schemeClr>
+            </a:gs>
+            <a:gs pos="46750">
+              <a:schemeClr val="accent1">
+                <a:shade val="90000"/>
+                <a:hueOff val="-183802"/>
+                <a:satOff val="-3307"/>
+                <a:lumOff val="26845"/>
+                <a:alphaOff val="0"/>
+                <a:tint val="71000"/>
+                <a:satMod val="112000"/>
+              </a:schemeClr>
+            </a:gs>
+            <a:gs pos="53000">
+              <a:schemeClr val="accent1">
+                <a:shade val="90000"/>
+                <a:hueOff val="-183802"/>
+                <a:satOff val="-3307"/>
+                <a:lumOff val="26845"/>
+                <a:alphaOff val="0"/>
+                <a:tint val="71000"/>
+                <a:satMod val="112000"/>
+              </a:schemeClr>
+            </a:gs>
+            <a:gs pos="68000">
+              <a:schemeClr val="accent1">
+                <a:shade val="90000"/>
+                <a:hueOff val="-183802"/>
+                <a:satOff val="-3307"/>
+                <a:lumOff val="26845"/>
+                <a:alphaOff val="0"/>
+                <a:tint val="86000"/>
+              </a:schemeClr>
+            </a:gs>
+            <a:gs pos="100000">
+              <a:schemeClr val="accent1">
+                <a:shade val="90000"/>
+                <a:hueOff val="-183802"/>
+                <a:satOff val="-3307"/>
+                <a:lumOff val="26845"/>
+                <a:alphaOff val="0"/>
+                <a:shade val="60000"/>
+              </a:schemeClr>
+            </a:gs>
+          </a:gsLst>
+          <a:lin ang="8350000" scaled="1"/>
+        </a:gradFill>
+        <a:ln>
+          <a:noFill/>
+        </a:ln>
+        <a:effectLst>
+          <a:outerShdw blurRad="190500" dist="228600" dir="2700000" sy="90000" rotWithShape="0">
+            <a:srgbClr val="000000">
+              <a:alpha val="25500"/>
+            </a:srgbClr>
+          </a:outerShdw>
+        </a:effectLst>
+      </dsp:spPr>
+      <dsp:style>
+        <a:lnRef idx="0">
+          <a:scrgbClr r="0" g="0" b="0"/>
+        </a:lnRef>
+        <a:fillRef idx="3">
+          <a:scrgbClr r="0" g="0" b="0"/>
+        </a:fillRef>
+        <a:effectRef idx="2">
+          <a:scrgbClr r="0" g="0" b="0"/>
+        </a:effectRef>
+        <a:fontRef idx="minor">
+          <a:schemeClr val="lt1"/>
+        </a:fontRef>
+      </dsp:style>
+      <dsp:txBody>
+        <a:bodyPr spcFirstLastPara="0" vert="horz" wrap="square" lIns="0" tIns="0" rIns="0" bIns="0" numCol="1" spcCol="1270" anchor="ctr" anchorCtr="0">
+          <a:noAutofit/>
+        </a:bodyPr>
+        <a:lstStyle/>
+        <a:p>
+          <a:pPr lvl="0" algn="ctr" defTabSz="711200">
+            <a:lnSpc>
+              <a:spcPct val="90000"/>
+            </a:lnSpc>
+            <a:spcBef>
+              <a:spcPct val="0"/>
+            </a:spcBef>
+            <a:spcAft>
+              <a:spcPct val="35000"/>
+            </a:spcAft>
+          </a:pPr>
+          <a:endParaRPr lang="ru-RU" sz="1600" kern="1200"/>
+        </a:p>
+      </dsp:txBody>
+      <dsp:txXfrm>
+        <a:off x="6681621" y="622180"/>
+        <a:ext cx="212693" cy="220396"/>
+      </dsp:txXfrm>
+    </dsp:sp>
+    <dsp:sp modelId="{767460B3-F7EC-41F1-9AB9-92A22C3CB032}">
+      <dsp:nvSpPr>
+        <dsp:cNvPr id="0" name=""/>
+        <dsp:cNvSpPr/>
+      </dsp:nvSpPr>
+      <dsp:spPr>
+        <a:xfrm>
+          <a:off x="7128793" y="288032"/>
+          <a:ext cx="1220487" cy="888694"/>
+        </a:xfrm>
+        <a:prstGeom prst="roundRect">
+          <a:avLst>
+            <a:gd name="adj" fmla="val 10000"/>
+          </a:avLst>
+        </a:prstGeom>
+        <a:gradFill rotWithShape="0">
+          <a:gsLst>
+            <a:gs pos="0">
+              <a:schemeClr val="accent1">
+                <a:alpha val="90000"/>
+                <a:hueOff val="0"/>
+                <a:satOff val="0"/>
+                <a:lumOff val="0"/>
+                <a:alphaOff val="-40000"/>
+                <a:shade val="60000"/>
+              </a:schemeClr>
+            </a:gs>
+            <a:gs pos="33000">
+              <a:schemeClr val="accent1">
+                <a:alpha val="90000"/>
+                <a:hueOff val="0"/>
+                <a:satOff val="0"/>
+                <a:lumOff val="0"/>
+                <a:alphaOff val="-40000"/>
+                <a:tint val="86500"/>
+              </a:schemeClr>
+            </a:gs>
+            <a:gs pos="46750">
+              <a:schemeClr val="accent1">
+                <a:alpha val="90000"/>
+                <a:hueOff val="0"/>
+                <a:satOff val="0"/>
+                <a:lumOff val="0"/>
+                <a:alphaOff val="-40000"/>
+                <a:tint val="71000"/>
+                <a:satMod val="112000"/>
+              </a:schemeClr>
+            </a:gs>
+            <a:gs pos="53000">
+              <a:schemeClr val="accent1">
+                <a:alpha val="90000"/>
+                <a:hueOff val="0"/>
+                <a:satOff val="0"/>
+                <a:lumOff val="0"/>
+                <a:alphaOff val="-40000"/>
+                <a:tint val="71000"/>
+                <a:satMod val="112000"/>
+              </a:schemeClr>
+            </a:gs>
+            <a:gs pos="68000">
+              <a:schemeClr val="accent1">
+                <a:alpha val="90000"/>
+                <a:hueOff val="0"/>
+                <a:satOff val="0"/>
+                <a:lumOff val="0"/>
+                <a:alphaOff val="-40000"/>
+                <a:tint val="86000"/>
+              </a:schemeClr>
+            </a:gs>
+            <a:gs pos="100000">
+              <a:schemeClr val="accent1">
+                <a:alpha val="90000"/>
+                <a:hueOff val="0"/>
+                <a:satOff val="0"/>
+                <a:lumOff val="0"/>
+                <a:alphaOff val="-40000"/>
+                <a:shade val="60000"/>
+              </a:schemeClr>
+            </a:gs>
+          </a:gsLst>
+          <a:lin ang="8350000" scaled="1"/>
+        </a:gradFill>
+        <a:ln>
+          <a:noFill/>
+        </a:ln>
+        <a:effectLst>
+          <a:outerShdw blurRad="190500" dist="228600" dir="2700000" sy="90000" rotWithShape="0">
+            <a:srgbClr val="000000">
+              <a:alpha val="25500"/>
+            </a:srgbClr>
+          </a:outerShdw>
+        </a:effectLst>
+      </dsp:spPr>
+      <dsp:style>
+        <a:lnRef idx="0">
+          <a:scrgbClr r="0" g="0" b="0"/>
+        </a:lnRef>
+        <a:fillRef idx="3">
+          <a:scrgbClr r="0" g="0" b="0"/>
+        </a:fillRef>
+        <a:effectRef idx="2">
+          <a:scrgbClr r="0" g="0" b="0"/>
+        </a:effectRef>
+        <a:fontRef idx="minor">
+          <a:schemeClr val="lt1"/>
+        </a:fontRef>
+      </dsp:style>
+      <dsp:txBody>
+        <a:bodyPr spcFirstLastPara="0" vert="horz" wrap="square" lIns="45720" tIns="45720" rIns="45720" bIns="45720" numCol="1" spcCol="1270" anchor="ctr" anchorCtr="0">
+          <a:noAutofit/>
+        </a:bodyPr>
+        <a:lstStyle/>
+        <a:p>
+          <a:pPr lvl="0" algn="ctr" defTabSz="533400">
+            <a:lnSpc>
+              <a:spcPct val="90000"/>
+            </a:lnSpc>
+            <a:spcBef>
+              <a:spcPct val="0"/>
+            </a:spcBef>
+            <a:spcAft>
+              <a:spcPct val="35000"/>
+            </a:spcAft>
+          </a:pPr>
+          <a:r>
+            <a:rPr lang="ru-RU" sz="1200" b="1" kern="1200" dirty="0" smtClean="0"/>
+            <a:t> Отправка договора эксперту</a:t>
+          </a:r>
+        </a:p>
+      </dsp:txBody>
+      <dsp:txXfrm>
+        <a:off x="7154822" y="314061"/>
+        <a:ext cx="1168429" cy="836636"/>
+      </dsp:txXfrm>
+    </dsp:sp>
   </dsp:spTree>
 </dsp:drawing>
 </file>
@@ -10568,7 +11787,7 @@
           <a:p>
             <a:fld id="{5B5CC06F-0F59-4AE7-909C-C5FEFEA5062E}" type="datetimeFigureOut">
               <a:rPr lang="ru-RU" smtClean="0"/>
-              <a:t>13.04.2026</a:t>
+              <a:t>03.05.2026</a:t>
             </a:fld>
             <a:endParaRPr lang="ru-RU"/>
           </a:p>
@@ -10794,7 +12013,7 @@
           <a:p>
             <a:fld id="{5B5CC06F-0F59-4AE7-909C-C5FEFEA5062E}" type="datetimeFigureOut">
               <a:rPr lang="ru-RU" smtClean="0"/>
-              <a:t>13.04.2026</a:t>
+              <a:t>03.05.2026</a:t>
             </a:fld>
             <a:endParaRPr lang="ru-RU"/>
           </a:p>
@@ -10969,7 +12188,7 @@
           <a:p>
             <a:fld id="{5B5CC06F-0F59-4AE7-909C-C5FEFEA5062E}" type="datetimeFigureOut">
               <a:rPr lang="ru-RU" smtClean="0"/>
-              <a:t>13.04.2026</a:t>
+              <a:t>03.05.2026</a:t>
             </a:fld>
             <a:endParaRPr lang="ru-RU"/>
           </a:p>
@@ -11134,7 +12353,7 @@
           <a:p>
             <a:fld id="{5B5CC06F-0F59-4AE7-909C-C5FEFEA5062E}" type="datetimeFigureOut">
               <a:rPr lang="ru-RU" smtClean="0"/>
-              <a:t>13.04.2026</a:t>
+              <a:t>03.05.2026</a:t>
             </a:fld>
             <a:endParaRPr lang="ru-RU"/>
           </a:p>
@@ -11378,7 +12597,7 @@
           <a:p>
             <a:fld id="{5B5CC06F-0F59-4AE7-909C-C5FEFEA5062E}" type="datetimeFigureOut">
               <a:rPr lang="ru-RU" smtClean="0"/>
-              <a:t>13.04.2026</a:t>
+              <a:t>03.05.2026</a:t>
             </a:fld>
             <a:endParaRPr lang="ru-RU"/>
           </a:p>
@@ -11642,7 +12861,7 @@
           <a:p>
             <a:fld id="{5B5CC06F-0F59-4AE7-909C-C5FEFEA5062E}" type="datetimeFigureOut">
               <a:rPr lang="ru-RU" smtClean="0"/>
-              <a:t>13.04.2026</a:t>
+              <a:t>03.05.2026</a:t>
             </a:fld>
             <a:endParaRPr lang="ru-RU"/>
           </a:p>
@@ -12016,7 +13235,7 @@
           <a:p>
             <a:fld id="{5B5CC06F-0F59-4AE7-909C-C5FEFEA5062E}" type="datetimeFigureOut">
               <a:rPr lang="ru-RU" smtClean="0"/>
-              <a:t>13.04.2026</a:t>
+              <a:t>03.05.2026</a:t>
             </a:fld>
             <a:endParaRPr lang="ru-RU"/>
           </a:p>
@@ -12129,7 +13348,7 @@
           <a:p>
             <a:fld id="{5B5CC06F-0F59-4AE7-909C-C5FEFEA5062E}" type="datetimeFigureOut">
               <a:rPr lang="ru-RU" smtClean="0"/>
-              <a:t>13.04.2026</a:t>
+              <a:t>03.05.2026</a:t>
             </a:fld>
             <a:endParaRPr lang="ru-RU"/>
           </a:p>
@@ -12219,7 +13438,7 @@
           <a:p>
             <a:fld id="{5B5CC06F-0F59-4AE7-909C-C5FEFEA5062E}" type="datetimeFigureOut">
               <a:rPr lang="ru-RU" smtClean="0"/>
-              <a:t>13.04.2026</a:t>
+              <a:t>03.05.2026</a:t>
             </a:fld>
             <a:endParaRPr lang="ru-RU"/>
           </a:p>
@@ -12477,7 +13696,7 @@
           <a:p>
             <a:fld id="{5B5CC06F-0F59-4AE7-909C-C5FEFEA5062E}" type="datetimeFigureOut">
               <a:rPr lang="ru-RU" smtClean="0"/>
-              <a:t>13.04.2026</a:t>
+              <a:t>03.05.2026</a:t>
             </a:fld>
             <a:endParaRPr lang="ru-RU"/>
           </a:p>
@@ -12741,7 +13960,7 @@
           <a:p>
             <a:fld id="{5B5CC06F-0F59-4AE7-909C-C5FEFEA5062E}" type="datetimeFigureOut">
               <a:rPr lang="ru-RU" smtClean="0"/>
-              <a:t>13.04.2026</a:t>
+              <a:t>03.05.2026</a:t>
             </a:fld>
             <a:endParaRPr lang="ru-RU"/>
           </a:p>
@@ -12958,7 +14177,7 @@
           <a:p>
             <a:fld id="{5B5CC06F-0F59-4AE7-909C-C5FEFEA5062E}" type="datetimeFigureOut">
               <a:rPr lang="ru-RU" smtClean="0"/>
-              <a:t>13.04.2026</a:t>
+              <a:t>03.05.2026</a:t>
             </a:fld>
             <a:endParaRPr lang="ru-RU"/>
           </a:p>
@@ -13659,6 +14878,579 @@
             <p:ph type="title"/>
           </p:nvPr>
         </p:nvSpPr>
+        <p:spPr>
+          <a:xfrm>
+            <a:off x="467544" y="3611"/>
+            <a:ext cx="8229600" cy="905109"/>
+          </a:xfrm>
+        </p:spPr>
+        <p:txBody>
+          <a:bodyPr/>
+          <a:lstStyle/>
+          <a:p>
+            <a:r>
+              <a:rPr lang="ru-RU" dirty="0"/>
+              <a:t>Работа эксперта в системе</a:t>
+            </a:r>
+          </a:p>
+        </p:txBody>
+      </p:sp>
+      <p:pic>
+        <p:nvPicPr>
+          <p:cNvPr id="6" name="Рисунок 5"/>
+          <p:cNvPicPr>
+            <a:picLocks noChangeAspect="1"/>
+          </p:cNvPicPr>
+          <p:nvPr/>
+        </p:nvPicPr>
+        <p:blipFill>
+          <a:blip r:embed="rId2">
+            <a:extLst>
+              <a:ext uri="{28A0092B-C50C-407E-A947-70E740481C1C}">
+                <a14:useLocalDpi xmlns:a14="http://schemas.microsoft.com/office/drawing/2010/main" val="0"/>
+              </a:ext>
+            </a:extLst>
+          </a:blip>
+          <a:stretch>
+            <a:fillRect/>
+          </a:stretch>
+        </p:blipFill>
+        <p:spPr>
+          <a:xfrm>
+            <a:off x="3923928" y="1268760"/>
+            <a:ext cx="4176464" cy="1752752"/>
+          </a:xfrm>
+          <a:prstGeom prst="rect">
+            <a:avLst/>
+          </a:prstGeom>
+        </p:spPr>
+      </p:pic>
+      <p:pic>
+        <p:nvPicPr>
+          <p:cNvPr id="8" name="Объект 7"/>
+          <p:cNvPicPr>
+            <a:picLocks noGrp="1" noChangeAspect="1"/>
+          </p:cNvPicPr>
+          <p:nvPr>
+            <p:ph idx="1"/>
+          </p:nvPr>
+        </p:nvPicPr>
+        <p:blipFill>
+          <a:blip r:embed="rId3">
+            <a:extLst>
+              <a:ext uri="{28A0092B-C50C-407E-A947-70E740481C1C}">
+                <a14:useLocalDpi xmlns:a14="http://schemas.microsoft.com/office/drawing/2010/main" val="0"/>
+              </a:ext>
+            </a:extLst>
+          </a:blip>
+          <a:stretch>
+            <a:fillRect/>
+          </a:stretch>
+        </p:blipFill>
+        <p:spPr>
+          <a:xfrm>
+            <a:off x="769672" y="3485997"/>
+            <a:ext cx="2664296" cy="3185436"/>
+          </a:xfrm>
+        </p:spPr>
+      </p:pic>
+      <p:pic>
+        <p:nvPicPr>
+          <p:cNvPr id="9" name="Рисунок 8"/>
+          <p:cNvPicPr>
+            <a:picLocks noChangeAspect="1"/>
+          </p:cNvPicPr>
+          <p:nvPr/>
+        </p:nvPicPr>
+        <p:blipFill>
+          <a:blip r:embed="rId4">
+            <a:extLst>
+              <a:ext uri="{28A0092B-C50C-407E-A947-70E740481C1C}">
+                <a14:useLocalDpi xmlns:a14="http://schemas.microsoft.com/office/drawing/2010/main" val="0"/>
+              </a:ext>
+            </a:extLst>
+          </a:blip>
+          <a:stretch>
+            <a:fillRect/>
+          </a:stretch>
+        </p:blipFill>
+        <p:spPr>
+          <a:xfrm>
+            <a:off x="4455612" y="3501008"/>
+            <a:ext cx="2728196" cy="3083406"/>
+          </a:xfrm>
+          <a:prstGeom prst="rect">
+            <a:avLst/>
+          </a:prstGeom>
+        </p:spPr>
+      </p:pic>
+      <p:sp>
+        <p:nvSpPr>
+          <p:cNvPr id="71" name="TextBox 70"/>
+          <p:cNvSpPr txBox="1"/>
+          <p:nvPr/>
+        </p:nvSpPr>
+        <p:spPr>
+          <a:xfrm>
+            <a:off x="1575856" y="3068960"/>
+            <a:ext cx="1195944" cy="369332"/>
+          </a:xfrm>
+          <a:prstGeom prst="rect">
+            <a:avLst/>
+          </a:prstGeom>
+          <a:noFill/>
+        </p:spPr>
+        <p:txBody>
+          <a:bodyPr wrap="square" rtlCol="0">
+            <a:spAutoFit/>
+          </a:bodyPr>
+          <a:lstStyle/>
+          <a:p>
+            <a:r>
+              <a:rPr lang="ru-RU" b="1" dirty="0"/>
+              <a:t>И</a:t>
+            </a:r>
+            <a:r>
+              <a:rPr lang="ru-RU" b="1" dirty="0" smtClean="0"/>
+              <a:t>стория</a:t>
+            </a:r>
+            <a:endParaRPr lang="ru-RU" b="1" dirty="0"/>
+          </a:p>
+        </p:txBody>
+      </p:sp>
+      <p:sp>
+        <p:nvSpPr>
+          <p:cNvPr id="72" name="TextBox 71"/>
+          <p:cNvSpPr txBox="1"/>
+          <p:nvPr/>
+        </p:nvSpPr>
+        <p:spPr>
+          <a:xfrm>
+            <a:off x="4455612" y="3068960"/>
+            <a:ext cx="2780684" cy="369332"/>
+          </a:xfrm>
+          <a:prstGeom prst="rect">
+            <a:avLst/>
+          </a:prstGeom>
+          <a:noFill/>
+        </p:spPr>
+        <p:txBody>
+          <a:bodyPr wrap="square" rtlCol="0">
+            <a:spAutoFit/>
+          </a:bodyPr>
+          <a:lstStyle/>
+          <a:p>
+            <a:r>
+              <a:rPr lang="ru-RU" b="1" dirty="0" smtClean="0"/>
+              <a:t>Открыть заявку по </a:t>
+            </a:r>
+            <a:r>
+              <a:rPr lang="en-US" b="1" dirty="0" smtClean="0"/>
+              <a:t>ID</a:t>
+            </a:r>
+            <a:endParaRPr lang="ru-RU" b="1" dirty="0"/>
+          </a:p>
+        </p:txBody>
+      </p:sp>
+      <p:sp>
+        <p:nvSpPr>
+          <p:cNvPr id="73" name="TextBox 72"/>
+          <p:cNvSpPr txBox="1"/>
+          <p:nvPr/>
+        </p:nvSpPr>
+        <p:spPr>
+          <a:xfrm>
+            <a:off x="323528" y="1498805"/>
+            <a:ext cx="2952328" cy="707886"/>
+          </a:xfrm>
+          <a:prstGeom prst="rect">
+            <a:avLst/>
+          </a:prstGeom>
+          <a:noFill/>
+        </p:spPr>
+        <p:txBody>
+          <a:bodyPr wrap="square" rtlCol="0">
+            <a:spAutoFit/>
+          </a:bodyPr>
+          <a:lstStyle/>
+          <a:p>
+            <a:r>
+              <a:rPr lang="ru-RU" sz="2000" b="1" dirty="0"/>
+              <a:t>Эксперт имеет доступ к </a:t>
+            </a:r>
+            <a:endParaRPr lang="en-US" sz="2000" b="1" dirty="0" smtClean="0"/>
+          </a:p>
+          <a:p>
+            <a:r>
+              <a:rPr lang="ru-RU" sz="2000" b="1" dirty="0" smtClean="0"/>
+              <a:t>управлению </a:t>
+            </a:r>
+            <a:r>
+              <a:rPr lang="ru-RU" sz="2000" b="1" dirty="0"/>
+              <a:t>заявками:</a:t>
+            </a:r>
+          </a:p>
+        </p:txBody>
+      </p:sp>
+      <p:sp>
+        <p:nvSpPr>
+          <p:cNvPr id="74" name="Стрелка вправо 73"/>
+          <p:cNvSpPr/>
+          <p:nvPr/>
+        </p:nvSpPr>
+        <p:spPr>
+          <a:xfrm>
+            <a:off x="3310118" y="1628305"/>
+            <a:ext cx="576064" cy="484632"/>
+          </a:xfrm>
+          <a:prstGeom prst="rightArrow">
+            <a:avLst/>
+          </a:prstGeom>
+        </p:spPr>
+        <p:style>
+          <a:lnRef idx="1">
+            <a:schemeClr val="accent1"/>
+          </a:lnRef>
+          <a:fillRef idx="2">
+            <a:schemeClr val="accent1"/>
+          </a:fillRef>
+          <a:effectRef idx="1">
+            <a:schemeClr val="accent1"/>
+          </a:effectRef>
+          <a:fontRef idx="minor">
+            <a:schemeClr val="dk1"/>
+          </a:fontRef>
+        </p:style>
+        <p:txBody>
+          <a:bodyPr rtlCol="0" anchor="ctr"/>
+          <a:lstStyle/>
+          <a:p>
+            <a:pPr algn="ctr"/>
+            <a:endParaRPr lang="ru-RU"/>
+          </a:p>
+        </p:txBody>
+      </p:sp>
+    </p:spTree>
+    <p:extLst>
+      <p:ext uri="{BB962C8B-B14F-4D97-AF65-F5344CB8AC3E}">
+        <p14:creationId xmlns:p14="http://schemas.microsoft.com/office/powerpoint/2010/main" val="3575686453"/>
+      </p:ext>
+    </p:extLst>
+  </p:cSld>
+  <p:clrMapOvr>
+    <a:masterClrMapping/>
+  </p:clrMapOvr>
+</p:sld>
+</file>
+
+<file path=ppt/slides/slide11.xml><?xml version="1.0" encoding="utf-8"?>
+<p:sld xmlns:a="http://schemas.openxmlformats.org/drawingml/2006/main" xmlns:r="http://schemas.openxmlformats.org/officeDocument/2006/relationships" xmlns:p="http://schemas.openxmlformats.org/presentationml/2006/main">
+  <p:cSld>
+    <p:spTree>
+      <p:nvGrpSpPr>
+        <p:cNvPr id="1" name=""/>
+        <p:cNvGrpSpPr/>
+        <p:nvPr/>
+      </p:nvGrpSpPr>
+      <p:grpSpPr>
+        <a:xfrm>
+          <a:off x="0" y="0"/>
+          <a:ext cx="0" cy="0"/>
+          <a:chOff x="0" y="0"/>
+          <a:chExt cx="0" cy="0"/>
+        </a:xfrm>
+      </p:grpSpPr>
+      <p:pic>
+        <p:nvPicPr>
+          <p:cNvPr id="13" name="Объект 12"/>
+          <p:cNvPicPr>
+            <a:picLocks noGrp="1" noChangeAspect="1"/>
+          </p:cNvPicPr>
+          <p:nvPr>
+            <p:ph idx="1"/>
+          </p:nvPr>
+        </p:nvPicPr>
+        <p:blipFill>
+          <a:blip r:embed="rId2">
+            <a:extLst>
+              <a:ext uri="{28A0092B-C50C-407E-A947-70E740481C1C}">
+                <a14:useLocalDpi xmlns:a14="http://schemas.microsoft.com/office/drawing/2010/main" val="0"/>
+              </a:ext>
+            </a:extLst>
+          </a:blip>
+          <a:stretch>
+            <a:fillRect/>
+          </a:stretch>
+        </p:blipFill>
+        <p:spPr>
+          <a:xfrm>
+            <a:off x="5220072" y="476672"/>
+            <a:ext cx="3811341" cy="3888432"/>
+          </a:xfrm>
+        </p:spPr>
+      </p:pic>
+      <p:sp>
+        <p:nvSpPr>
+          <p:cNvPr id="14" name="TextBox 13"/>
+          <p:cNvSpPr txBox="1"/>
+          <p:nvPr/>
+        </p:nvSpPr>
+        <p:spPr>
+          <a:xfrm>
+            <a:off x="395536" y="476672"/>
+            <a:ext cx="3416384" cy="461665"/>
+          </a:xfrm>
+          <a:prstGeom prst="rect">
+            <a:avLst/>
+          </a:prstGeom>
+          <a:noFill/>
+        </p:spPr>
+        <p:txBody>
+          <a:bodyPr wrap="none" rtlCol="0">
+            <a:spAutoFit/>
+          </a:bodyPr>
+          <a:lstStyle/>
+          <a:p>
+            <a:r>
+              <a:rPr lang="ru-RU" sz="2400" b="1" dirty="0"/>
+              <a:t>Управление </a:t>
+            </a:r>
+            <a:r>
+              <a:rPr lang="ru-RU" sz="2400" b="1" dirty="0" smtClean="0"/>
+              <a:t>статусами</a:t>
+            </a:r>
+            <a:r>
+              <a:rPr lang="en-US" sz="2400" b="1" dirty="0" smtClean="0"/>
+              <a:t>:</a:t>
+            </a:r>
+            <a:endParaRPr lang="ru-RU" sz="2400" b="1" dirty="0"/>
+          </a:p>
+        </p:txBody>
+      </p:sp>
+      <p:sp>
+        <p:nvSpPr>
+          <p:cNvPr id="15" name="TextBox 14"/>
+          <p:cNvSpPr txBox="1"/>
+          <p:nvPr/>
+        </p:nvSpPr>
+        <p:spPr>
+          <a:xfrm>
+            <a:off x="107504" y="1196752"/>
+            <a:ext cx="3219536" cy="1754326"/>
+          </a:xfrm>
+          <a:prstGeom prst="rect">
+            <a:avLst/>
+          </a:prstGeom>
+          <a:noFill/>
+        </p:spPr>
+        <p:txBody>
+          <a:bodyPr wrap="none" rtlCol="0">
+            <a:spAutoFit/>
+          </a:bodyPr>
+          <a:lstStyle/>
+          <a:p>
+            <a:pPr marL="285750" indent="-285750">
+              <a:buFontTx/>
+              <a:buChar char="-"/>
+            </a:pPr>
+            <a:r>
+              <a:rPr lang="ru-RU" dirty="0" smtClean="0"/>
+              <a:t>Новый (</a:t>
+            </a:r>
+            <a:r>
+              <a:rPr lang="ru-RU" dirty="0"/>
+              <a:t>По умолчанию при </a:t>
+            </a:r>
+            <a:endParaRPr lang="en-US" dirty="0" smtClean="0"/>
+          </a:p>
+          <a:p>
+            <a:r>
+              <a:rPr lang="en-US" dirty="0" smtClean="0"/>
+              <a:t>     </a:t>
+            </a:r>
+            <a:r>
+              <a:rPr lang="ru-RU" dirty="0" smtClean="0"/>
+              <a:t>создании </a:t>
+            </a:r>
+            <a:r>
+              <a:rPr lang="ru-RU" dirty="0"/>
+              <a:t>новой заявки)</a:t>
+            </a:r>
+            <a:endParaRPr lang="ru-RU" dirty="0" smtClean="0"/>
+          </a:p>
+          <a:p>
+            <a:pPr marL="285750" indent="-285750">
+              <a:buFontTx/>
+              <a:buChar char="-"/>
+            </a:pPr>
+            <a:r>
+              <a:rPr lang="ru-RU" dirty="0" smtClean="0"/>
+              <a:t>В работе</a:t>
+            </a:r>
+          </a:p>
+          <a:p>
+            <a:pPr marL="285750" indent="-285750">
+              <a:buFontTx/>
+              <a:buChar char="-"/>
+            </a:pPr>
+            <a:r>
+              <a:rPr lang="ru-RU" dirty="0" smtClean="0"/>
+              <a:t>Выполнено</a:t>
+            </a:r>
+          </a:p>
+          <a:p>
+            <a:pPr marL="285750" indent="-285750">
+              <a:buFontTx/>
+              <a:buChar char="-"/>
+            </a:pPr>
+            <a:r>
+              <a:rPr lang="ru-RU" dirty="0" smtClean="0"/>
+              <a:t>Отменено</a:t>
+            </a:r>
+          </a:p>
+          <a:p>
+            <a:endParaRPr lang="ru-RU" dirty="0"/>
+          </a:p>
+        </p:txBody>
+      </p:sp>
+      <p:pic>
+        <p:nvPicPr>
+          <p:cNvPr id="16" name="Рисунок 15"/>
+          <p:cNvPicPr>
+            <a:picLocks noChangeAspect="1"/>
+          </p:cNvPicPr>
+          <p:nvPr/>
+        </p:nvPicPr>
+        <p:blipFill>
+          <a:blip r:embed="rId3">
+            <a:extLst>
+              <a:ext uri="{28A0092B-C50C-407E-A947-70E740481C1C}">
+                <a14:useLocalDpi xmlns:a14="http://schemas.microsoft.com/office/drawing/2010/main" val="0"/>
+              </a:ext>
+            </a:extLst>
+          </a:blip>
+          <a:stretch>
+            <a:fillRect/>
+          </a:stretch>
+        </p:blipFill>
+        <p:spPr>
+          <a:xfrm>
+            <a:off x="5220072" y="4797152"/>
+            <a:ext cx="3816424" cy="1191551"/>
+          </a:xfrm>
+          <a:prstGeom prst="rect">
+            <a:avLst/>
+          </a:prstGeom>
+        </p:spPr>
+      </p:pic>
+      <p:sp>
+        <p:nvSpPr>
+          <p:cNvPr id="17" name="Стрелка вправо 16"/>
+          <p:cNvSpPr/>
+          <p:nvPr/>
+        </p:nvSpPr>
+        <p:spPr>
+          <a:xfrm>
+            <a:off x="3563888" y="1484784"/>
+            <a:ext cx="978408" cy="484632"/>
+          </a:xfrm>
+          <a:prstGeom prst="rightArrow">
+            <a:avLst/>
+          </a:prstGeom>
+        </p:spPr>
+        <p:style>
+          <a:lnRef idx="1">
+            <a:schemeClr val="accent2"/>
+          </a:lnRef>
+          <a:fillRef idx="2">
+            <a:schemeClr val="accent2"/>
+          </a:fillRef>
+          <a:effectRef idx="1">
+            <a:schemeClr val="accent2"/>
+          </a:effectRef>
+          <a:fontRef idx="minor">
+            <a:schemeClr val="dk1"/>
+          </a:fontRef>
+        </p:style>
+        <p:txBody>
+          <a:bodyPr rtlCol="0" anchor="ctr"/>
+          <a:lstStyle/>
+          <a:p>
+            <a:pPr algn="ctr"/>
+            <a:endParaRPr lang="ru-RU"/>
+          </a:p>
+        </p:txBody>
+      </p:sp>
+      <p:sp>
+        <p:nvSpPr>
+          <p:cNvPr id="18" name="TextBox 17"/>
+          <p:cNvSpPr txBox="1"/>
+          <p:nvPr/>
+        </p:nvSpPr>
+        <p:spPr>
+          <a:xfrm>
+            <a:off x="97088" y="4944893"/>
+            <a:ext cx="4539581" cy="369332"/>
+          </a:xfrm>
+          <a:prstGeom prst="rect">
+            <a:avLst/>
+          </a:prstGeom>
+          <a:noFill/>
+        </p:spPr>
+        <p:txBody>
+          <a:bodyPr wrap="square" rtlCol="0">
+            <a:spAutoFit/>
+          </a:bodyPr>
+          <a:lstStyle/>
+          <a:p>
+            <a:r>
+              <a:rPr lang="ru-RU" b="1" dirty="0" smtClean="0"/>
+              <a:t>Получаем выбранный экспертом договор</a:t>
+            </a:r>
+            <a:endParaRPr lang="ru-RU" b="1" dirty="0"/>
+          </a:p>
+        </p:txBody>
+      </p:sp>
+    </p:spTree>
+    <p:extLst>
+      <p:ext uri="{BB962C8B-B14F-4D97-AF65-F5344CB8AC3E}">
+        <p14:creationId xmlns:p14="http://schemas.microsoft.com/office/powerpoint/2010/main" val="250006068"/>
+      </p:ext>
+    </p:extLst>
+  </p:cSld>
+  <p:clrMapOvr>
+    <a:masterClrMapping/>
+  </p:clrMapOvr>
+</p:sld>
+</file>
+
+<file path=ppt/slides/slide12.xml><?xml version="1.0" encoding="utf-8"?>
+<p:sld xmlns:a="http://schemas.openxmlformats.org/drawingml/2006/main" xmlns:r="http://schemas.openxmlformats.org/officeDocument/2006/relationships" xmlns:p="http://schemas.openxmlformats.org/presentationml/2006/main">
+  <p:cSld>
+    <p:spTree>
+      <p:nvGrpSpPr>
+        <p:cNvPr id="1" name=""/>
+        <p:cNvGrpSpPr/>
+        <p:nvPr/>
+      </p:nvGrpSpPr>
+      <p:grpSpPr>
+        <a:xfrm>
+          <a:off x="0" y="0"/>
+          <a:ext cx="0" cy="0"/>
+          <a:chOff x="0" y="0"/>
+          <a:chExt cx="0" cy="0"/>
+        </a:xfrm>
+      </p:grpSpPr>
+      <p:sp>
+        <p:nvSpPr>
+          <p:cNvPr id="2" name="Заголовок 1"/>
+          <p:cNvSpPr>
+            <a:spLocks noGrp="1"/>
+          </p:cNvSpPr>
+          <p:nvPr>
+            <p:ph type="title"/>
+          </p:nvPr>
+        </p:nvSpPr>
         <p:spPr/>
         <p:txBody>
           <a:bodyPr>
@@ -13823,7 +15615,7 @@
 </p:sld>
 </file>
 
-<file path=ppt/slides/slide11.xml><?xml version="1.0" encoding="utf-8"?>
+<file path=ppt/slides/slide13.xml><?xml version="1.0" encoding="utf-8"?>
 <p:sld xmlns:a="http://schemas.openxmlformats.org/drawingml/2006/main" xmlns:r="http://schemas.openxmlformats.org/officeDocument/2006/relationships" xmlns:p="http://schemas.openxmlformats.org/presentationml/2006/main">
   <p:cSld>
     <p:spTree>
@@ -14176,7 +15968,7 @@
 </p:sld>
 </file>
 
-<file path=ppt/slides/slide12.xml><?xml version="1.0" encoding="utf-8"?>
+<file path=ppt/slides/slide14.xml><?xml version="1.0" encoding="utf-8"?>
 <p:sld xmlns:a="http://schemas.openxmlformats.org/drawingml/2006/main" xmlns:r="http://schemas.openxmlformats.org/officeDocument/2006/relationships" xmlns:p="http://schemas.openxmlformats.org/presentationml/2006/main">
   <p:cSld>
     <p:spTree>
@@ -14395,7 +16187,7 @@
 </p:sld>
 </file>
 
-<file path=ppt/slides/slide13.xml><?xml version="1.0" encoding="utf-8"?>
+<file path=ppt/slides/slide15.xml><?xml version="1.0" encoding="utf-8"?>
 <p:sld xmlns:a="http://schemas.openxmlformats.org/drawingml/2006/main" xmlns:r="http://schemas.openxmlformats.org/officeDocument/2006/relationships" xmlns:p="http://schemas.openxmlformats.org/presentationml/2006/main">
   <p:cSld>
     <p:spTree>
@@ -14549,7 +16341,7 @@
 </p:sld>
 </file>
 
-<file path=ppt/slides/slide14.xml><?xml version="1.0" encoding="utf-8"?>
+<file path=ppt/slides/slide16.xml><?xml version="1.0" encoding="utf-8"?>
 <p:sld xmlns:a="http://schemas.openxmlformats.org/drawingml/2006/main" xmlns:r="http://schemas.openxmlformats.org/officeDocument/2006/relationships" xmlns:p="http://schemas.openxmlformats.org/presentationml/2006/main">
   <p:cSld>
     <p:spTree>
@@ -14658,7 +16450,7 @@
 </p:sld>
 </file>
 
-<file path=ppt/slides/slide15.xml><?xml version="1.0" encoding="utf-8"?>
+<file path=ppt/slides/slide17.xml><?xml version="1.0" encoding="utf-8"?>
 <p:sld xmlns:a="http://schemas.openxmlformats.org/drawingml/2006/main" xmlns:r="http://schemas.openxmlformats.org/officeDocument/2006/relationships" xmlns:p="http://schemas.openxmlformats.org/presentationml/2006/main">
   <p:cSld>
     <p:spTree>
@@ -14776,7 +16568,7 @@
 </p:sld>
 </file>
 
-<file path=ppt/slides/slide16.xml><?xml version="1.0" encoding="utf-8"?>
+<file path=ppt/slides/slide18.xml><?xml version="1.0" encoding="utf-8"?>
 <p:sld xmlns:a="http://schemas.openxmlformats.org/drawingml/2006/main" xmlns:r="http://schemas.openxmlformats.org/officeDocument/2006/relationships" xmlns:p="http://schemas.openxmlformats.org/presentationml/2006/main">
   <p:cSld>
     <p:spTree>
@@ -14828,7 +16620,7 @@
         </p:nvSpPr>
         <p:spPr>
           <a:xfrm>
-            <a:off x="611560" y="3068960"/>
+            <a:off x="611560" y="1916832"/>
             <a:ext cx="8229600" cy="676672"/>
           </a:xfrm>
         </p:spPr>
@@ -14851,14 +16643,14 @@
       </p:sp>
       <p:pic>
         <p:nvPicPr>
-          <p:cNvPr id="4" name="Рисунок 3"/>
+          <p:cNvPr id="6" name="Рисунок 5"/>
           <p:cNvPicPr>
             <a:picLocks noChangeAspect="1"/>
           </p:cNvPicPr>
           <p:nvPr/>
         </p:nvPicPr>
         <p:blipFill>
-          <a:blip r:embed="rId2" cstate="print">
+          <a:blip r:embed="rId2">
             <a:extLst>
               <a:ext uri="{28A0092B-C50C-407E-A947-70E740481C1C}">
                 <a14:useLocalDpi xmlns:a14="http://schemas.microsoft.com/office/drawing/2010/main" val="0"/>
@@ -14871,8 +16663,8 @@
         </p:blipFill>
         <p:spPr>
           <a:xfrm>
-            <a:off x="2987824" y="4581128"/>
-            <a:ext cx="2736304" cy="1702440"/>
+            <a:off x="2771800" y="3501008"/>
+            <a:ext cx="3168352" cy="3224090"/>
           </a:xfrm>
           <a:prstGeom prst="rect">
             <a:avLst/>
@@ -16058,7 +17850,7 @@
         <p:spPr>
           <a:xfrm>
             <a:off x="755576" y="176754"/>
-            <a:ext cx="7488832" cy="731966"/>
+            <a:ext cx="7488832" cy="515942"/>
           </a:xfrm>
           <a:prstGeom prst="rect">
             <a:avLst/>
@@ -16066,7 +17858,7 @@
         </p:spPr>
         <p:txBody>
           <a:bodyPr vert="horz" lIns="91440" tIns="45720" rIns="91440" bIns="45720" rtlCol="0" anchor="ctr">
-            <a:normAutofit lnSpcReduction="10000"/>
+            <a:normAutofit fontScale="77500" lnSpcReduction="20000"/>
           </a:bodyPr>
           <a:lstStyle>
             <a:lvl1pPr algn="ctr" defTabSz="914400" rtl="0" eaLnBrk="1" latinLnBrk="0" hangingPunct="1">
@@ -16095,9 +17887,8 @@
             </a:r>
             <a:r>
               <a:rPr lang="ru-RU" dirty="0" smtClean="0"/>
-              <a:t>Бота</a:t>
-            </a:r>
-            <a:endParaRPr lang="ru-RU" dirty="0"/>
+              <a:t>Бота (клиент)</a:t>
+            </a:r>
           </a:p>
         </p:txBody>
       </p:sp>
